--- a/Dossier_Investisseur_EnerTchad.pptx
+++ b/Dossier_Investisseur_EnerTchad.pptx
@@ -2379,7 +2379,7 @@
                 <a:ea typeface="Calibri" pitchFamily="34" charset="-122"/>
                 <a:cs typeface="Calibri" pitchFamily="34" charset="-120"/>
               </a:rPr>
-              <a:t>Dossier investisseur · Juin 2026 · Confidentiel</a:t>
+              <a:t>Dossier investisseur · Juillet 2026 · Confidentiel</a:t>
             </a:r>
             <a:endParaRPr lang="en-US" sz="1200" dirty="0"/>
           </a:p>

--- a/Dossier_Investisseur_EnerTchad.pptx
+++ b/Dossier_Investisseur_EnerTchad.pptx
@@ -4545,7 +4545,7 @@
                 <a:ea typeface="Calibri" pitchFamily="34" charset="-122"/>
                 <a:cs typeface="Calibri" pitchFamily="34" charset="-120"/>
               </a:rPr>
-              <a:t>+235 99 29 86 96
+              <a:t>contact@enertchad.td · +235 99 29 86 96
 </a:t>
             </a:r>
             <a:pPr indent="0" marL="0">
